--- a/decks/geog-weather-hazards/geog-weather-hazards_ch1_atmospheric-circulation.pptx
+++ b/decks/geog-weather-hazards/geog-weather-hazards_ch1_atmospheric-circulation.pptx
@@ -128,30 +128,30 @@
   <p:extLst>
     <p:ext uri="{521415D9-36F7-43E2-AB2F-B90AF26B5E84}">
       <p14:sectionLst xmlns:p14="http://schemas.microsoft.com/office/powerpoint/2010/main">
-        <p14:section name="Opening" id="{b2f8b8d0-faff-461e-a548-bc4a3ed9555c}">
+        <p14:section name="Opening" id="{f1d43042-7365-1789-23d4-faa08956b365}">
           <p14:sldIdLst>
             <p14:sldId id="256"/>
           </p14:sldIdLst>
         </p14:section>
-        <p14:section name="Gate" id="{0121d282-e78f-96b1-b8a1-d1809db18146}">
+        <p14:section name="Gate" id="{e6ad14fe-1505-829b-9ae4-2473d74adb86}">
           <p14:sldIdLst>
             <p14:sldId id="257"/>
             <p14:sldId id="258"/>
           </p14:sldIdLst>
         </p14:section>
-        <p14:section name="Pre-teach" id="{c373858c-705a-05fb-87f0-7b68cfed3d98}">
+        <p14:section name="Pre-teach" id="{a6b0122a-6220-7db4-a553-6d09ca38a57a}">
           <p14:sldIdLst>
             <p14:sldId id="259"/>
             <p14:sldId id="260"/>
           </p14:sldIdLst>
         </p14:section>
-        <p14:section name="Read-along" id="{cc20a529-32da-4bda-4dfc-90e93e847980}">
+        <p14:section name="Read-along" id="{ea4e7810-6b8b-769a-5831-88cd278db27d}">
           <p14:sldIdLst>
             <p14:sldId id="261"/>
             <p14:sldId id="262"/>
           </p14:sldIdLst>
         </p14:section>
-        <p14:section name="Teach" id="{d90f6b80-51eb-25b7-1a77-8e59349f51d4}">
+        <p14:section name="Teach" id="{df05b9a2-1c33-7ab7-23c3-470ab13e93c8}">
           <p14:sldIdLst>
             <p14:sldId id="263"/>
             <p14:sldId id="264"/>
@@ -162,7 +162,7 @@
             <p14:sldId id="269"/>
           </p14:sldIdLst>
         </p14:section>
-        <p14:section name="Routes" id="{cc856016-be1d-88c4-0c2c-5cd2cd137cac}">
+        <p14:section name="Routes" id="{48dda2fd-297e-16ee-c563-32f66c0898c2}">
           <p14:sldIdLst>
             <p14:sldId id="270"/>
             <p14:sldId id="271"/>
@@ -170,12 +170,12 @@
             <p14:sldId id="273"/>
           </p14:sldIdLst>
         </p14:section>
-        <p14:section name="Close" id="{c7c4681e-328e-5f94-2d1b-eb653c87cd40}">
+        <p14:section name="Close" id="{79f18a4b-effc-84a6-daa4-7c0bc0e9fcf0}">
           <p14:sldIdLst>
             <p14:sldId id="274"/>
           </p14:sldIdLst>
         </p14:section>
-        <p14:section name="Answers" id="{97293627-8f65-c462-1878-f6ddfadab331}">
+        <p14:section name="Answers" id="{25937df3-36b7-4628-9b9e-68ae2346a27e}">
           <p14:sldIdLst>
             <p14:sldId id="275"/>
             <p14:sldId id="276"/>
@@ -681,7 +681,7 @@
 Because the Earth is a sphere, the equator gets the most direct sunshine and the poles the least. The air above the equator is heated most, rises, and spreads out towards the poles high in the atmosphere. It cannot travel all the way in one go. Instead the atmosphere is organised into three giant loops of air, called cells, in each hemisphere. What happens in the northern hemisphere is mirrored in the southern hemisphere.
 The Hadley cell is the loop between the equator and the tropics (the Tropic of Cancer in the north, the Tropic of Capricorn in the south). Warm, moist air rises at the equator, giving a belt of low pressure, cloud and heavy rain. High up it cools and moves away from the equator, then sinks as cooler, dry air over the tropics, giving a belt of high pressure and dry weather. The Ferrel cell is the loop between the tropics and the Arctic or Antarctic circle; the UK sits under it. The Polar cell is the loop between the circles and the poles, where very cold, dense air sinks, giving high pressure at the poles.
 The three cells meet at belts of rising and sinking air. Where air rises, between the Hadley and Ferrel cells at about 60 degrees, there is low pressure and unsettled weather; where air sinks, at the tropics and the poles, there is high pressure. Read a world map of deserts and rainforests and you are reading the cells: rainforests sit under the rising air of the equator and many deserts under the sinking air of the tropics.
-Worked example — model it step by step, thinking aloud: Describe and explain how the circulation of air within the atmosphere causes areas of high and low pressure. (6 marks) (1) Start with the cause: the equator is heated most by the Sun, so the air there is warmed, expands and rises. (2) Link rising air to pressure: rising air takes weight off the surface, so a belt of low pressure forms at the equator, with cloud and rain. (3) Follow the air: high in the atmosphere it moves away from the equator and cools. Cool air is dense, so it sinks over the tropics. (4) Link sinking air to pressure: sinking air presses on the surface, so a belt of high pressure forms at the tropics, with dry weather. Name the loop: the Hadley cell. (5) Finish the pattern: air rises again at about 60 degrees (low pressure) and sinks at the poles (high pressure), forming the Ferrel and Polar cells. (6) Six marks need both describe (where the belts are) and explain (why rising means low and sinking means high), with the cells named. Answer: A six-mark answer traces heated air rising at the equator (low pressure, rain), cooling and sinking over the tropics (high pressure, dry), names the Hadley, Ferrel and Polar cells, and explains that rising air lowers pressure at the surface while sinking air raises it..
+Worked example — model it step by step, thinking aloud: Describe and explain how air moving in the three cells creates belts of high and low pressure around the world. (6 marks) (1) Start with the cause: the equator is heated most by the Sun, so the air there is warmed, expands and rises. (2) Link rising air to pressure: rising air takes weight off the surface, so a belt of low pressure forms at the equator, with cloud and rain. (3) Follow the air: high in the atmosphere it moves away from the equator and cools. Cool air is dense, so it sinks over the tropics. (4) Link sinking air to pressure: sinking air presses on the surface, so a belt of high pressure forms at the tropics, with dry weather. Name the loop: the Hadley cell. (5) Finish the pattern: air rises again at about 60 degrees (low pressure) and sinks at the poles (high pressure), forming the Ferrel and Polar cells. (6) Six marks need both describe (where the belts are) and explain (why rising means low and sinking means high), with the cells named. Answer: A six-mark answer traces heated air rising at the equator (low pressure, rain), cooling and sinking over the tropics (high pressure, dry), names the Hadley, Ferrel and Polar cells, and explains that rising air lowers pressure at the surface while sinking air raises it..
 Tip: Describe and explain is two jobs. Describe where the high and low pressure belts are; explain them with rising and sinking air.</a:t>
             </a:r>
             <a:endParaRPr lang="en-US" dirty="0"/>
@@ -774,7 +774,7 @@
 Because the Earth is a sphere, the equator gets the most direct sunshine and the poles the least. The air above the equator is heated most, rises, and spreads out towards the poles high in the atmosphere. It cannot travel all the way in one go. Instead the atmosphere is organised into three giant loops of air, called cells, in each hemisphere. What happens in the northern hemisphere is mirrored in the southern hemisphere.
 The Hadley cell is the loop between the equator and the tropics (the Tropic of Cancer in the north, the Tropic of Capricorn in the south). Warm, moist air rises at the equator, giving a belt of low pressure, cloud and heavy rain. High up it cools and moves away from the equator, then sinks as cooler, dry air over the tropics, giving a belt of high pressure and dry weather. The Ferrel cell is the loop between the tropics and the Arctic or Antarctic circle; the UK sits under it. The Polar cell is the loop between the circles and the poles, where very cold, dense air sinks, giving high pressure at the poles.
 The three cells meet at belts of rising and sinking air. Where air rises, between the Hadley and Ferrel cells at about 60 degrees, there is low pressure and unsettled weather; where air sinks, at the tropics and the poles, there is high pressure. Read a world map of deserts and rainforests and you are reading the cells: rainforests sit under the rising air of the equator and many deserts under the sinking air of the tropics.
-Worked example — model it step by step, thinking aloud: Describe and explain how the circulation of air within the atmosphere causes areas of high and low pressure. (6 marks) (1) Start with the cause: the equator is heated most by the Sun, so the air there is warmed, expands and rises. (2) Link rising air to pressure: rising air takes weight off the surface, so a belt of low pressure forms at the equator, with cloud and rain. (3) Follow the air: high in the atmosphere it moves away from the equator and cools. Cool air is dense, so it sinks over the tropics. (4) Link sinking air to pressure: sinking air presses on the surface, so a belt of high pressure forms at the tropics, with dry weather. Name the loop: the Hadley cell. (5) Finish the pattern: air rises again at about 60 degrees (low pressure) and sinks at the poles (high pressure), forming the Ferrel and Polar cells. (6) Six marks need both describe (where the belts are) and explain (why rising means low and sinking means high), with the cells named. Answer: A six-mark answer traces heated air rising at the equator (low pressure, rain), cooling and sinking over the tropics (high pressure, dry), names the Hadley, Ferrel and Polar cells, and explains that rising air lowers pressure at the surface while sinking air raises it..
+Worked example — model it step by step, thinking aloud: Describe and explain how air moving in the three cells creates belts of high and low pressure around the world. (6 marks) (1) Start with the cause: the equator is heated most by the Sun, so the air there is warmed, expands and rises. (2) Link rising air to pressure: rising air takes weight off the surface, so a belt of low pressure forms at the equator, with cloud and rain. (3) Follow the air: high in the atmosphere it moves away from the equator and cools. Cool air is dense, so it sinks over the tropics. (4) Link sinking air to pressure: sinking air presses on the surface, so a belt of high pressure forms at the tropics, with dry weather. Name the loop: the Hadley cell. (5) Finish the pattern: air rises again at about 60 degrees (low pressure) and sinks at the poles (high pressure), forming the Ferrel and Polar cells. (6) Six marks need both describe (where the belts are) and explain (why rising means low and sinking means high), with the cells named. Answer: A six-mark answer traces heated air rising at the equator (low pressure, rain), cooling and sinking over the tropics (high pressure, dry), names the Hadley, Ferrel and Polar cells, and explains that rising air lowers pressure at the surface while sinking air raises it..
 Tip: Describe and explain is two jobs. Describe where the high and low pressure belts are; explain them with rising and sinking air.</a:t>
             </a:r>
             <a:endParaRPr lang="en-US" dirty="0"/>
@@ -867,7 +867,7 @@
 Because the Earth is a sphere, the equator gets the most direct sunshine and the poles the least. The air above the equator is heated most, rises, and spreads out towards the poles high in the atmosphere. It cannot travel all the way in one go. Instead the atmosphere is organised into three giant loops of air, called cells, in each hemisphere. What happens in the northern hemisphere is mirrored in the southern hemisphere.
 The Hadley cell is the loop between the equator and the tropics (the Tropic of Cancer in the north, the Tropic of Capricorn in the south). Warm, moist air rises at the equator, giving a belt of low pressure, cloud and heavy rain. High up it cools and moves away from the equator, then sinks as cooler, dry air over the tropics, giving a belt of high pressure and dry weather. The Ferrel cell is the loop between the tropics and the Arctic or Antarctic circle; the UK sits under it. The Polar cell is the loop between the circles and the poles, where very cold, dense air sinks, giving high pressure at the poles.
 The three cells meet at belts of rising and sinking air. Where air rises, between the Hadley and Ferrel cells at about 60 degrees, there is low pressure and unsettled weather; where air sinks, at the tropics and the poles, there is high pressure. Read a world map of deserts and rainforests and you are reading the cells: rainforests sit under the rising air of the equator and many deserts under the sinking air of the tropics.
-Worked example — model it step by step, thinking aloud: Describe and explain how the circulation of air within the atmosphere causes areas of high and low pressure. (6 marks) (1) Start with the cause: the equator is heated most by the Sun, so the air there is warmed, expands and rises. (2) Link rising air to pressure: rising air takes weight off the surface, so a belt of low pressure forms at the equator, with cloud and rain. (3) Follow the air: high in the atmosphere it moves away from the equator and cools. Cool air is dense, so it sinks over the tropics. (4) Link sinking air to pressure: sinking air presses on the surface, so a belt of high pressure forms at the tropics, with dry weather. Name the loop: the Hadley cell. (5) Finish the pattern: air rises again at about 60 degrees (low pressure) and sinks at the poles (high pressure), forming the Ferrel and Polar cells. (6) Six marks need both describe (where the belts are) and explain (why rising means low and sinking means high), with the cells named. Answer: A six-mark answer traces heated air rising at the equator (low pressure, rain), cooling and sinking over the tropics (high pressure, dry), names the Hadley, Ferrel and Polar cells, and explains that rising air lowers pressure at the surface while sinking air raises it..
+Worked example — model it step by step, thinking aloud: Describe and explain how air moving in the three cells creates belts of high and low pressure around the world. (6 marks) (1) Start with the cause: the equator is heated most by the Sun, so the air there is warmed, expands and rises. (2) Link rising air to pressure: rising air takes weight off the surface, so a belt of low pressure forms at the equator, with cloud and rain. (3) Follow the air: high in the atmosphere it moves away from the equator and cools. Cool air is dense, so it sinks over the tropics. (4) Link sinking air to pressure: sinking air presses on the surface, so a belt of high pressure forms at the tropics, with dry weather. Name the loop: the Hadley cell. (5) Finish the pattern: air rises again at about 60 degrees (low pressure) and sinks at the poles (high pressure), forming the Ferrel and Polar cells. (6) Six marks need both describe (where the belts are) and explain (why rising means low and sinking means high), with the cells named. Answer: A six-mark answer traces heated air rising at the equator (low pressure, rain), cooling and sinking over the tropics (high pressure, dry), names the Hadley, Ferrel and Polar cells, and explains that rising air lowers pressure at the surface while sinking air raises it..
 Tip: Describe and explain is two jobs. Describe where the high and low pressure belts are; explain them with rising and sinking air.</a:t>
             </a:r>
             <a:endParaRPr lang="en-US" dirty="0"/>
@@ -2542,7 +2542,7 @@
 Because the Earth is a sphere, the equator gets the most direct sunshine and the poles the least. The air above the equator is heated most, rises, and spreads out towards the poles high in the atmosphere. It cannot travel all the way in one go. Instead the atmosphere is organised into three giant loops of air, called cells, in each hemisphere. What happens in the northern hemisphere is mirrored in the southern hemisphere.
 The Hadley cell is the loop between the equator and the tropics (the Tropic of Cancer in the north, the Tropic of Capricorn in the south). Warm, moist air rises at the equator, giving a belt of low pressure, cloud and heavy rain. High up it cools and moves away from the equator, then sinks as cooler, dry air over the tropics, giving a belt of high pressure and dry weather. The Ferrel cell is the loop between the tropics and the Arctic or Antarctic circle; the UK sits under it. The Polar cell is the loop between the circles and the poles, where very cold, dense air sinks, giving high pressure at the poles.
 The three cells meet at belts of rising and sinking air. Where air rises, between the Hadley and Ferrel cells at about 60 degrees, there is low pressure and unsettled weather; where air sinks, at the tropics and the poles, there is high pressure. Read a world map of deserts and rainforests and you are reading the cells: rainforests sit under the rising air of the equator and many deserts under the sinking air of the tropics.
-Worked example — model it step by step, thinking aloud: Describe and explain how the circulation of air within the atmosphere causes areas of high and low pressure. (6 marks) (1) Start with the cause: the equator is heated most by the Sun, so the air there is warmed, expands and rises. (2) Link rising air to pressure: rising air takes weight off the surface, so a belt of low pressure forms at the equator, with cloud and rain. (3) Follow the air: high in the atmosphere it moves away from the equator and cools. Cool air is dense, so it sinks over the tropics. (4) Link sinking air to pressure: sinking air presses on the surface, so a belt of high pressure forms at the tropics, with dry weather. Name the loop: the Hadley cell. (5) Finish the pattern: air rises again at about 60 degrees (low pressure) and sinks at the poles (high pressure), forming the Ferrel and Polar cells. (6) Six marks need both describe (where the belts are) and explain (why rising means low and sinking means high), with the cells named. Answer: A six-mark answer traces heated air rising at the equator (low pressure, rain), cooling and sinking over the tropics (high pressure, dry), names the Hadley, Ferrel and Polar cells, and explains that rising air lowers pressure at the surface while sinking air raises it..
+Worked example — model it step by step, thinking aloud: Describe and explain how air moving in the three cells creates belts of high and low pressure around the world. (6 marks) (1) Start with the cause: the equator is heated most by the Sun, so the air there is warmed, expands and rises. (2) Link rising air to pressure: rising air takes weight off the surface, so a belt of low pressure forms at the equator, with cloud and rain. (3) Follow the air: high in the atmosphere it moves away from the equator and cools. Cool air is dense, so it sinks over the tropics. (4) Link sinking air to pressure: sinking air presses on the surface, so a belt of high pressure forms at the tropics, with dry weather. Name the loop: the Hadley cell. (5) Finish the pattern: air rises again at about 60 degrees (low pressure) and sinks at the poles (high pressure), forming the Ferrel and Polar cells. (6) Six marks need both describe (where the belts are) and explain (why rising means low and sinking means high), with the cells named. Answer: A six-mark answer traces heated air rising at the equator (low pressure, rain), cooling and sinking over the tropics (high pressure, dry), names the Hadley, Ferrel and Polar cells, and explains that rising air lowers pressure at the surface while sinking air raises it..
 Tip: Describe and explain is two jobs. Describe where the high and low pressure belts are; explain them with rising and sinking air.</a:t>
             </a:r>
             <a:endParaRPr lang="en-US" dirty="0"/>
@@ -4347,7 +4347,7 @@
                 <a:ea typeface="Calibri" pitchFamily="34" charset="-122"/>
                 <a:cs typeface="Calibri" pitchFamily="34" charset="-120"/>
               </a:rPr>
-              <a:t>Describe and explain how the circulation of air within the atmosphere causes areas of high and low pressure. (6 marks)</a:t>
+              <a:t>Describe and explain how air moving in the three cells creates belts of high and low pressure around the world. (6 marks)</a:t>
             </a:r>
             <a:endParaRPr lang="en-US" sz="2200" dirty="0"/>
           </a:p>
@@ -4877,7 +4877,7 @@
                 <a:ea typeface="Calibri" pitchFamily="34" charset="-122"/>
                 <a:cs typeface="Calibri" pitchFamily="34" charset="-120"/>
               </a:rPr>
-              <a:t>Describe and explain how the circulation of air within the atmosphere causes areas of high and low pressure. (6 marks)</a:t>
+              <a:t>Describe and explain how air moving in the three cells creates belts of high and low pressure around the world. (6 marks)</a:t>
             </a:r>
             <a:endParaRPr lang="en-US" sz="2200" dirty="0"/>
           </a:p>
@@ -5407,7 +5407,7 @@
                 <a:ea typeface="Calibri" pitchFamily="34" charset="-122"/>
                 <a:cs typeface="Calibri" pitchFamily="34" charset="-120"/>
               </a:rPr>
-              <a:t>Describe and explain how the circulation of air within the atmosphere causes areas of high and low pressure. (6 marks)</a:t>
+              <a:t>Describe and explain how air moving in the three cells creates belts of high and low pressure around the world. (6 marks)</a:t>
             </a:r>
             <a:endParaRPr lang="en-US" sz="2200" dirty="0"/>
           </a:p>
